--- a/Lesson33-VotingEnsembles/Lesson33-VotingEnsembles.pptx
+++ b/Lesson33-VotingEnsembles/Lesson33-VotingEnsembles.pptx
@@ -511,7 +511,7 @@
           <a:p>
             <a:r>
               <a:rPr lang="en-US" dirty="0"/>
-              <a:t>This lesson samples the same question several times and aggregates the independent answers by majority vote, instead of synthesizing them into a new one. It is built on Lesson 32's mechanics: the same concurrent fan-out, then a fan-in step. But it targets a different class of problem, one with a single correct answer, where the goal is to let the crowd cancel out one sample's mistake rather than blend everyone's phrasing together. The technique is called self-consistency.</a:t>
+              <a:t>This lesson samples the same question several times and aggregates the independent answers by vote, where the most common answer wins, instead of synthesizing them into a new one. It is built on Lesson 32's mechanics: the same concurrent fan-out, then a fan-in step. But it targets a different class of problem, one with a single correct answer, where the goal is to let the crowd cancel out one sample's mistake rather than blend everyone's phrasing together. The technique is called self-consistency.</a:t>
             </a:r>
             <a:endParaRPr lang="en-US" dirty="0"/>
           </a:p>
@@ -863,7 +863,7 @@
           <a:p>
             <a:r>
               <a:rPr lang="en-US" dirty="0"/>
-              <a:t>Here is the whole pipeline. The question is the classic bat-and-ball puzzle: a bat and a ball cost a dollar ten in total, and the bat costs a dollar more than the ball; how much is the ball? Program.cs launches five SampleAsync calls with Task.WhenAll, exactly like Lesson 32's fan-out, each at temperature 0.8 and each returning a typed ReasoningSample. Samples that threw, or that came back as unparseable JSON, are filtered out. ConsensusVoter then normalizes each final answer, trimming whitespace and a leading dollar sign, and tallies the votes. The answer with the most votes wins, and a tie is reported as a tie. A single reasoning path that stumbles is now just one vote among several that didn't.</a:t>
+              <a:t>Here is the whole pipeline. The question is the classic bat-and-ball puzzle: a bat and a ball cost a dollar ten in total, and the bat costs a dollar more than the ball; how much is the ball? Program.cs launches five SampleAsync calls with Task.WhenAll, exactly like Lesson 32's fan-out, each at temperature 0.8 and each returning a typed ReasoningSample. Samples that threw, or that came back as unparseable JSON, are filtered out. ConsensusVoter then normalizes each final answer, trimming whitespace and a leading dollar sign, and tallies the votes. The answer with the most votes wins, even if that's less than half of them: this is a plurality vote, not a majority vote, so a 2-1-1-1 split still has a winner. Only a shared top count is a tie, and it is reported as one. A single reasoning path that stumbles is now just one vote among several that didn't.</a:t>
             </a:r>
             <a:endParaRPr lang="en-US" dirty="0"/>
           </a:p>
@@ -1127,7 +1127,7 @@
           <a:p>
             <a:r>
               <a:rPr lang="en-US" dirty="0"/>
-              <a:t>Voting doesn't need all five samples to agree; it needs enough of them to. Program.cs wraps each sample call in its own try and catch, so one dropped connection prints a warning and returns null, costing one vote rather than the whole run. A malformed JSON response doesn't throw, so it's handled differently: SampleAsync returns a sentinel sample whose final answer is the literal string UNPARSEABLE. Program.cs filters those out before tallying, so a malformed response can't cast, or even win, a vote for a value nobody actually said. When fewer than five samples are votable, the program says the tally is based on, for example, four of five. If two answers share the top count, it prints TIE and NO CONSENSUS, then shows one of the tied answers. And if nothing votable is left at all, it says no consensus can be computed and stops.</a:t>
+              <a:t>Voting doesn't need all five samples to agree; it needs enough of them to. Program.cs wraps each sample call in its own try and catch, so one dropped connection prints a warning and returns null, costing one vote rather than the whole run. The surviving samples keep their original numbers, so if sample 2 drops, the output goes from Sample 1 straight to Sample 3. A malformed JSON response doesn't throw, so it's handled differently: SampleAsync returns a sentinel sample whose final answer is the literal string UNPARSEABLE. Program.cs filters those out before tallying, so a malformed response can't cast, or even win, a vote for a value nobody actually said. When fewer than five samples are votable, the program says the tally is based on, for example, four of five. If two or more answers share the top count, it prints a TIE line saying how many answers share that count, then NO CONSENSUS, then shows one of the tied answers. And if nothing votable is left at all, it says no consensus can be computed and stops.</a:t>
             </a:r>
             <a:endParaRPr lang="en-US" dirty="0"/>
           </a:p>
@@ -1787,7 +1787,7 @@
                 <a:ea typeface="Calibri" pitchFamily="34" charset="-122"/>
                 <a:cs typeface="Calibri" pitchFamily="34" charset="-120"/>
               </a:rPr>
-              <a:t>Ask the same question five times and let the majority answer win</a:t>
+              <a:t>Ask the same question five times and let the most common answer win</a:t>
             </a:r>
             <a:endParaRPr lang="en-US" sz="1600" dirty="0"/>
           </a:p>
@@ -1943,7 +1943,7 @@
                 <a:ea typeface="Courier New" pitchFamily="34" charset="-122"/>
                 <a:cs typeface="Courier New" pitchFamily="34" charset="-120"/>
               </a:rPr>
-              <a:t>a majority-vote answer</a:t>
+              <a:t>a most-votes answer</a:t>
             </a:r>
             <a:endParaRPr lang="en-US" sz="1100" dirty="0"/>
           </a:p>
